--- a/slides/MediFlowAI_RDMU_Final_Presentation.pptx
+++ b/slides/MediFlowAI_RDMU_Final_Presentation.pptx
@@ -3415,7 +3415,7 @@
                   <a:srgbClr val="86EFAC"/>
                 </a:solidFill>
               </a:rPr>
-              <a:t>GitHub Repo   :  [PASTE_GITHUB_REPO_LINK_HERE]</a:t>
+              <a:t>GitHub Repo   :  https://github.com/krish2105/mediflow-ai-rdmu-final</a:t>
             </a:r>
           </a:p>
         </p:txBody>
@@ -3877,7 +3877,7 @@
                   <a:srgbClr val="93C5FD"/>
                 </a:solidFill>
               </a:rPr>
-              <a:t>Colab: [PASTE_ACCESSIBLE_COLAB_LINK_HERE]   GitHub: [PASTE_GITHUB_REPO_LINK_HERE]   App: [PASTE_STREAMLIT_APP_LINK_HERE]</a:t>
+              <a:t>Colab: [PASTE_ACCESSIBLE_COLAB_LINK_HERE]   GitHub: https://github.com/krish2105/mediflow-ai-rdmu-final   App: [PASTE_STREAMLIT_APP_LINK_HERE]</a:t>
             </a:r>
           </a:p>
         </p:txBody>
@@ -5923,7 +5923,7 @@
                   <a:srgbClr val="86EFAC"/>
                 </a:solidFill>
               </a:rPr>
-              <a:t>App: [PASTE_STREAMLIT_APP_LINK_HERE]   |   GitHub: [PASTE_GITHUB_REPO_LINK_HERE]</a:t>
+              <a:t>App: [PASTE_STREAMLIT_APP_LINK_HERE]   |   GitHub: https://github.com/krish2105/mediflow-ai-rdmu-final</a:t>
             </a:r>
           </a:p>
         </p:txBody>
@@ -5991,7 +5991,7 @@
                   <a:srgbClr val="93C5FD"/>
                 </a:solidFill>
               </a:rPr>
-              <a:t>Colab: [PASTE_ACCESSIBLE_COLAB_LINK_HERE]   GitHub: [PASTE_GITHUB_REPO_LINK_HERE]   App: [PASTE_STREAMLIT_APP_LINK_HERE]</a:t>
+              <a:t>Colab: [PASTE_ACCESSIBLE_COLAB_LINK_HERE]   GitHub: https://github.com/krish2105/mediflow-ai-rdmu-final   App: [PASTE_STREAMLIT_APP_LINK_HERE]</a:t>
             </a:r>
           </a:p>
         </p:txBody>

--- a/slides/MediFlowAI_RDMU_Final_Presentation.pptx
+++ b/slides/MediFlowAI_RDMU_Final_Presentation.pptx
@@ -3381,7 +3381,7 @@
                   <a:srgbClr val="86EFAC"/>
                 </a:solidFill>
               </a:rPr>
-              <a:t>Google Colab  :  [PASTE_ACCESSIBLE_COLAB_LINK_HERE]</a:t>
+              <a:t>Google Colab  :  https://colab.research.google.com/drive/1LjqDNOLf4z481r_s1NxHATEMKN2ynbZO#scrollTo=2b3c8630</a:t>
             </a:r>
           </a:p>
         </p:txBody>
@@ -3449,7 +3449,7 @@
                   <a:srgbClr val="86EFAC"/>
                 </a:solidFill>
               </a:rPr>
-              <a:t>Streamlit App :  [PASTE_STREAMLIT_APP_LINK_HERE]</a:t>
+              <a:t>Streamlit App :  https://mediflow-ai-rdmu-final-vyj96f9xwbtezqmelhjq6c.streamlit.app/</a:t>
             </a:r>
           </a:p>
         </p:txBody>
@@ -3877,7 +3877,7 @@
                   <a:srgbClr val="93C5FD"/>
                 </a:solidFill>
               </a:rPr>
-              <a:t>Colab: [PASTE_ACCESSIBLE_COLAB_LINK_HERE]   GitHub: https://github.com/krish2105/mediflow-ai-rdmu-final   App: [PASTE_STREAMLIT_APP_LINK_HERE]</a:t>
+              <a:t>Colab: https://colab.research.google.com/drive/1LjqDNOLf4z481r_s1NxHATEMKN2ynbZO#scrollTo=2b3c8630   GitHub: https://github.com/krish2105/mediflow-ai-rdmu-final   App: https://mediflow-ai-rdmu-final-vyj96f9xwbtezqmelhjq6c.streamlit.app/</a:t>
             </a:r>
           </a:p>
         </p:txBody>
@@ -5923,7 +5923,7 @@
                   <a:srgbClr val="86EFAC"/>
                 </a:solidFill>
               </a:rPr>
-              <a:t>App: [PASTE_STREAMLIT_APP_LINK_HERE]   |   GitHub: https://github.com/krish2105/mediflow-ai-rdmu-final</a:t>
+              <a:t>App: https://mediflow-ai-rdmu-final-vyj96f9xwbtezqmelhjq6c.streamlit.app/   |   GitHub: https://github.com/krish2105/mediflow-ai-rdmu-final</a:t>
             </a:r>
           </a:p>
         </p:txBody>
@@ -5991,7 +5991,7 @@
                   <a:srgbClr val="93C5FD"/>
                 </a:solidFill>
               </a:rPr>
-              <a:t>Colab: [PASTE_ACCESSIBLE_COLAB_LINK_HERE]   GitHub: https://github.com/krish2105/mediflow-ai-rdmu-final   App: [PASTE_STREAMLIT_APP_LINK_HERE]</a:t>
+              <a:t>Colab: https://colab.research.google.com/drive/1LjqDNOLf4z481r_s1NxHATEMKN2ynbZO#scrollTo=2b3c8630   GitHub: https://github.com/krish2105/mediflow-ai-rdmu-final   App: https://mediflow-ai-rdmu-final-vyj96f9xwbtezqmelhjq6c.streamlit.app/</a:t>
             </a:r>
           </a:p>
         </p:txBody>
